--- a/Soo-Ho Park USRA S26 Poster.pptx
+++ b/Soo-Ho Park USRA S26 Poster.pptx
@@ -2,12 +2,12 @@
 <file path=ppt/presentation.xml><?xml version="1.0" encoding="utf-8"?>
 <p:presentation xmlns:a="http://schemas.openxmlformats.org/drawingml/2006/main" xmlns:r="http://schemas.openxmlformats.org/officeDocument/2006/relationships" xmlns:p="http://schemas.openxmlformats.org/presentationml/2006/main" saveSubsetFonts="1">
   <p:sldMasterIdLst>
-    <p:sldMasterId id="2147483696" r:id="rId1"/>
+    <p:sldMasterId id="2147483708" r:id="rId1"/>
   </p:sldMasterIdLst>
   <p:sldIdLst>
     <p:sldId id="256" r:id="rId2"/>
   </p:sldIdLst>
-  <p:sldSz cx="13716000" cy="27432000"/>
+  <p:sldSz cx="21945600" cy="32918400"/>
   <p:notesSz cx="6858000" cy="9144000"/>
   <p:defaultTextStyle>
     <a:defPPr>
@@ -141,15 +141,15 @@
         </p:nvSpPr>
         <p:spPr>
           <a:xfrm>
-            <a:off x="1028700" y="4489452"/>
-            <a:ext cx="11658600" cy="9550400"/>
+            <a:off x="1645920" y="5387342"/>
+            <a:ext cx="18653760" cy="11460480"/>
           </a:xfrm>
         </p:spPr>
         <p:txBody>
           <a:bodyPr anchor="b"/>
           <a:lstStyle>
             <a:lvl1pPr algn="ctr">
-              <a:defRPr sz="9000"/>
+              <a:defRPr sz="14400"/>
             </a:lvl1pPr>
           </a:lstStyle>
           <a:p>
@@ -173,8 +173,8 @@
         </p:nvSpPr>
         <p:spPr>
           <a:xfrm>
-            <a:off x="1714500" y="14408152"/>
-            <a:ext cx="10287000" cy="6623048"/>
+            <a:off x="2743200" y="17289782"/>
+            <a:ext cx="16459200" cy="7947658"/>
           </a:xfrm>
         </p:spPr>
         <p:txBody>
@@ -182,39 +182,39 @@
           <a:lstStyle>
             <a:lvl1pPr marL="0" indent="0" algn="ctr">
               <a:buNone/>
-              <a:defRPr sz="3600"/>
+              <a:defRPr sz="5760"/>
             </a:lvl1pPr>
-            <a:lvl2pPr marL="685800" indent="0" algn="ctr">
+            <a:lvl2pPr marL="1097280" indent="0" algn="ctr">
               <a:buNone/>
-              <a:defRPr sz="3000"/>
+              <a:defRPr sz="4800"/>
             </a:lvl2pPr>
-            <a:lvl3pPr marL="1371600" indent="0" algn="ctr">
+            <a:lvl3pPr marL="2194560" indent="0" algn="ctr">
               <a:buNone/>
-              <a:defRPr sz="2700"/>
+              <a:defRPr sz="4320"/>
             </a:lvl3pPr>
-            <a:lvl4pPr marL="2057400" indent="0" algn="ctr">
+            <a:lvl4pPr marL="3291840" indent="0" algn="ctr">
               <a:buNone/>
-              <a:defRPr sz="2400"/>
+              <a:defRPr sz="3840"/>
             </a:lvl4pPr>
-            <a:lvl5pPr marL="2743200" indent="0" algn="ctr">
+            <a:lvl5pPr marL="4389120" indent="0" algn="ctr">
               <a:buNone/>
-              <a:defRPr sz="2400"/>
+              <a:defRPr sz="3840"/>
             </a:lvl5pPr>
-            <a:lvl6pPr marL="3429000" indent="0" algn="ctr">
+            <a:lvl6pPr marL="5486400" indent="0" algn="ctr">
               <a:buNone/>
-              <a:defRPr sz="2400"/>
+              <a:defRPr sz="3840"/>
             </a:lvl6pPr>
-            <a:lvl7pPr marL="4114800" indent="0" algn="ctr">
+            <a:lvl7pPr marL="6583680" indent="0" algn="ctr">
               <a:buNone/>
-              <a:defRPr sz="2400"/>
+              <a:defRPr sz="3840"/>
             </a:lvl7pPr>
-            <a:lvl8pPr marL="4800600" indent="0" algn="ctr">
+            <a:lvl8pPr marL="7680960" indent="0" algn="ctr">
               <a:buNone/>
-              <a:defRPr sz="2400"/>
+              <a:defRPr sz="3840"/>
             </a:lvl8pPr>
-            <a:lvl9pPr marL="5486400" indent="0" algn="ctr">
+            <a:lvl9pPr marL="8778240" indent="0" algn="ctr">
               <a:buNone/>
-              <a:defRPr sz="2400"/>
+              <a:defRPr sz="3840"/>
             </a:lvl9pPr>
           </a:lstStyle>
           <a:p>
@@ -294,7 +294,7 @@
     </p:spTree>
     <p:extLst>
       <p:ext uri="{BB962C8B-B14F-4D97-AF65-F5344CB8AC3E}">
-        <p14:creationId xmlns:p14="http://schemas.microsoft.com/office/powerpoint/2010/main" val="3419999111"/>
+        <p14:creationId xmlns:p14="http://schemas.microsoft.com/office/powerpoint/2010/main" val="1304641094"/>
       </p:ext>
     </p:extLst>
   </p:cSld>
@@ -464,7 +464,7 @@
     </p:spTree>
     <p:extLst>
       <p:ext uri="{BB962C8B-B14F-4D97-AF65-F5344CB8AC3E}">
-        <p14:creationId xmlns:p14="http://schemas.microsoft.com/office/powerpoint/2010/main" val="454626077"/>
+        <p14:creationId xmlns:p14="http://schemas.microsoft.com/office/powerpoint/2010/main" val="1447377697"/>
       </p:ext>
     </p:extLst>
   </p:cSld>
@@ -503,8 +503,8 @@
         </p:nvSpPr>
         <p:spPr>
           <a:xfrm>
-            <a:off x="9815513" y="1460500"/>
-            <a:ext cx="2957513" cy="23247352"/>
+            <a:off x="15704821" y="1752600"/>
+            <a:ext cx="4732020" cy="27896822"/>
           </a:xfrm>
         </p:spPr>
         <p:txBody>
@@ -531,8 +531,8 @@
         </p:nvSpPr>
         <p:spPr>
           <a:xfrm>
-            <a:off x="942976" y="1460500"/>
-            <a:ext cx="8701088" cy="23247352"/>
+            <a:off x="1508761" y="1752600"/>
+            <a:ext cx="13921740" cy="27896822"/>
           </a:xfrm>
         </p:spPr>
         <p:txBody>
@@ -644,7 +644,7 @@
     </p:spTree>
     <p:extLst>
       <p:ext uri="{BB962C8B-B14F-4D97-AF65-F5344CB8AC3E}">
-        <p14:creationId xmlns:p14="http://schemas.microsoft.com/office/powerpoint/2010/main" val="2957016904"/>
+        <p14:creationId xmlns:p14="http://schemas.microsoft.com/office/powerpoint/2010/main" val="885938244"/>
       </p:ext>
     </p:extLst>
   </p:cSld>
@@ -814,7 +814,7 @@
     </p:spTree>
     <p:extLst>
       <p:ext uri="{BB962C8B-B14F-4D97-AF65-F5344CB8AC3E}">
-        <p14:creationId xmlns:p14="http://schemas.microsoft.com/office/powerpoint/2010/main" val="2971630007"/>
+        <p14:creationId xmlns:p14="http://schemas.microsoft.com/office/powerpoint/2010/main" val="1127066814"/>
       </p:ext>
     </p:extLst>
   </p:cSld>
@@ -853,15 +853,15 @@
         </p:nvSpPr>
         <p:spPr>
           <a:xfrm>
-            <a:off x="935832" y="6838958"/>
-            <a:ext cx="11830050" cy="11410948"/>
+            <a:off x="1497331" y="8206749"/>
+            <a:ext cx="18928080" cy="13693138"/>
           </a:xfrm>
         </p:spPr>
         <p:txBody>
           <a:bodyPr anchor="b"/>
           <a:lstStyle>
             <a:lvl1pPr>
-              <a:defRPr sz="9000"/>
+              <a:defRPr sz="14400"/>
             </a:lvl1pPr>
           </a:lstStyle>
           <a:p>
@@ -885,8 +885,8 @@
         </p:nvSpPr>
         <p:spPr>
           <a:xfrm>
-            <a:off x="935832" y="18357858"/>
-            <a:ext cx="11830050" cy="6000748"/>
+            <a:off x="1497331" y="22029429"/>
+            <a:ext cx="18928080" cy="7200898"/>
           </a:xfrm>
         </p:spPr>
         <p:txBody>
@@ -894,7 +894,7 @@
           <a:lstStyle>
             <a:lvl1pPr marL="0" indent="0">
               <a:buNone/>
-              <a:defRPr sz="3600">
+              <a:defRPr sz="5760">
                 <a:solidFill>
                   <a:schemeClr val="tx1">
                     <a:tint val="82000"/>
@@ -902,9 +902,9 @@
                 </a:solidFill>
               </a:defRPr>
             </a:lvl1pPr>
-            <a:lvl2pPr marL="685800" indent="0">
+            <a:lvl2pPr marL="1097280" indent="0">
               <a:buNone/>
-              <a:defRPr sz="3000">
+              <a:defRPr sz="4800">
                 <a:solidFill>
                   <a:schemeClr val="tx1">
                     <a:tint val="82000"/>
@@ -912,9 +912,9 @@
                 </a:solidFill>
               </a:defRPr>
             </a:lvl2pPr>
-            <a:lvl3pPr marL="1371600" indent="0">
+            <a:lvl3pPr marL="2194560" indent="0">
               <a:buNone/>
-              <a:defRPr sz="2700">
+              <a:defRPr sz="4320">
                 <a:solidFill>
                   <a:schemeClr val="tx1">
                     <a:tint val="82000"/>
@@ -922,9 +922,9 @@
                 </a:solidFill>
               </a:defRPr>
             </a:lvl3pPr>
-            <a:lvl4pPr marL="2057400" indent="0">
+            <a:lvl4pPr marL="3291840" indent="0">
               <a:buNone/>
-              <a:defRPr sz="2400">
+              <a:defRPr sz="3840">
                 <a:solidFill>
                   <a:schemeClr val="tx1">
                     <a:tint val="82000"/>
@@ -932,9 +932,9 @@
                 </a:solidFill>
               </a:defRPr>
             </a:lvl4pPr>
-            <a:lvl5pPr marL="2743200" indent="0">
+            <a:lvl5pPr marL="4389120" indent="0">
               <a:buNone/>
-              <a:defRPr sz="2400">
+              <a:defRPr sz="3840">
                 <a:solidFill>
                   <a:schemeClr val="tx1">
                     <a:tint val="82000"/>
@@ -942,9 +942,9 @@
                 </a:solidFill>
               </a:defRPr>
             </a:lvl5pPr>
-            <a:lvl6pPr marL="3429000" indent="0">
+            <a:lvl6pPr marL="5486400" indent="0">
               <a:buNone/>
-              <a:defRPr sz="2400">
+              <a:defRPr sz="3840">
                 <a:solidFill>
                   <a:schemeClr val="tx1">
                     <a:tint val="82000"/>
@@ -952,9 +952,9 @@
                 </a:solidFill>
               </a:defRPr>
             </a:lvl6pPr>
-            <a:lvl7pPr marL="4114800" indent="0">
+            <a:lvl7pPr marL="6583680" indent="0">
               <a:buNone/>
-              <a:defRPr sz="2400">
+              <a:defRPr sz="3840">
                 <a:solidFill>
                   <a:schemeClr val="tx1">
                     <a:tint val="82000"/>
@@ -962,9 +962,9 @@
                 </a:solidFill>
               </a:defRPr>
             </a:lvl7pPr>
-            <a:lvl8pPr marL="4800600" indent="0">
+            <a:lvl8pPr marL="7680960" indent="0">
               <a:buNone/>
-              <a:defRPr sz="2400">
+              <a:defRPr sz="3840">
                 <a:solidFill>
                   <a:schemeClr val="tx1">
                     <a:tint val="82000"/>
@@ -972,9 +972,9 @@
                 </a:solidFill>
               </a:defRPr>
             </a:lvl8pPr>
-            <a:lvl9pPr marL="5486400" indent="0">
+            <a:lvl9pPr marL="8778240" indent="0">
               <a:buNone/>
-              <a:defRPr sz="2400">
+              <a:defRPr sz="3840">
                 <a:solidFill>
                   <a:schemeClr val="tx1">
                     <a:tint val="82000"/>
@@ -1060,7 +1060,7 @@
     </p:spTree>
     <p:extLst>
       <p:ext uri="{BB962C8B-B14F-4D97-AF65-F5344CB8AC3E}">
-        <p14:creationId xmlns:p14="http://schemas.microsoft.com/office/powerpoint/2010/main" val="312114649"/>
+        <p14:creationId xmlns:p14="http://schemas.microsoft.com/office/powerpoint/2010/main" val="480519831"/>
       </p:ext>
     </p:extLst>
   </p:cSld>
@@ -1122,8 +1122,8 @@
         </p:nvSpPr>
         <p:spPr>
           <a:xfrm>
-            <a:off x="942975" y="7302500"/>
-            <a:ext cx="5829300" cy="17405352"/>
+            <a:off x="1508760" y="8763000"/>
+            <a:ext cx="9326880" cy="20886422"/>
           </a:xfrm>
         </p:spPr>
         <p:txBody>
@@ -1179,8 +1179,8 @@
         </p:nvSpPr>
         <p:spPr>
           <a:xfrm>
-            <a:off x="6943725" y="7302500"/>
-            <a:ext cx="5829300" cy="17405352"/>
+            <a:off x="11109960" y="8763000"/>
+            <a:ext cx="9326880" cy="20886422"/>
           </a:xfrm>
         </p:spPr>
         <p:txBody>
@@ -1292,7 +1292,7 @@
     </p:spTree>
     <p:extLst>
       <p:ext uri="{BB962C8B-B14F-4D97-AF65-F5344CB8AC3E}">
-        <p14:creationId xmlns:p14="http://schemas.microsoft.com/office/powerpoint/2010/main" val="1847502424"/>
+        <p14:creationId xmlns:p14="http://schemas.microsoft.com/office/powerpoint/2010/main" val="493514175"/>
       </p:ext>
     </p:extLst>
   </p:cSld>
@@ -1331,8 +1331,8 @@
         </p:nvSpPr>
         <p:spPr>
           <a:xfrm>
-            <a:off x="944762" y="1460506"/>
-            <a:ext cx="11830050" cy="5302252"/>
+            <a:off x="1511618" y="1752607"/>
+            <a:ext cx="18928080" cy="6362702"/>
           </a:xfrm>
         </p:spPr>
         <p:txBody>
@@ -1359,8 +1359,8 @@
         </p:nvSpPr>
         <p:spPr>
           <a:xfrm>
-            <a:off x="944763" y="6724652"/>
-            <a:ext cx="5802510" cy="3295648"/>
+            <a:off x="1511621" y="8069582"/>
+            <a:ext cx="9284016" cy="3954778"/>
           </a:xfrm>
         </p:spPr>
         <p:txBody>
@@ -1368,39 +1368,39 @@
           <a:lstStyle>
             <a:lvl1pPr marL="0" indent="0">
               <a:buNone/>
-              <a:defRPr sz="3600" b="1"/>
+              <a:defRPr sz="5760" b="1"/>
             </a:lvl1pPr>
-            <a:lvl2pPr marL="685800" indent="0">
+            <a:lvl2pPr marL="1097280" indent="0">
               <a:buNone/>
-              <a:defRPr sz="3000" b="1"/>
+              <a:defRPr sz="4800" b="1"/>
             </a:lvl2pPr>
-            <a:lvl3pPr marL="1371600" indent="0">
+            <a:lvl3pPr marL="2194560" indent="0">
               <a:buNone/>
-              <a:defRPr sz="2700" b="1"/>
+              <a:defRPr sz="4320" b="1"/>
             </a:lvl3pPr>
-            <a:lvl4pPr marL="2057400" indent="0">
+            <a:lvl4pPr marL="3291840" indent="0">
               <a:buNone/>
-              <a:defRPr sz="2400" b="1"/>
+              <a:defRPr sz="3840" b="1"/>
             </a:lvl4pPr>
-            <a:lvl5pPr marL="2743200" indent="0">
+            <a:lvl5pPr marL="4389120" indent="0">
               <a:buNone/>
-              <a:defRPr sz="2400" b="1"/>
+              <a:defRPr sz="3840" b="1"/>
             </a:lvl5pPr>
-            <a:lvl6pPr marL="3429000" indent="0">
+            <a:lvl6pPr marL="5486400" indent="0">
               <a:buNone/>
-              <a:defRPr sz="2400" b="1"/>
+              <a:defRPr sz="3840" b="1"/>
             </a:lvl6pPr>
-            <a:lvl7pPr marL="4114800" indent="0">
+            <a:lvl7pPr marL="6583680" indent="0">
               <a:buNone/>
-              <a:defRPr sz="2400" b="1"/>
+              <a:defRPr sz="3840" b="1"/>
             </a:lvl7pPr>
-            <a:lvl8pPr marL="4800600" indent="0">
+            <a:lvl8pPr marL="7680960" indent="0">
               <a:buNone/>
-              <a:defRPr sz="2400" b="1"/>
+              <a:defRPr sz="3840" b="1"/>
             </a:lvl8pPr>
-            <a:lvl9pPr marL="5486400" indent="0">
+            <a:lvl9pPr marL="8778240" indent="0">
               <a:buNone/>
-              <a:defRPr sz="2400" b="1"/>
+              <a:defRPr sz="3840" b="1"/>
             </a:lvl9pPr>
           </a:lstStyle>
           <a:p>
@@ -1424,8 +1424,8 @@
         </p:nvSpPr>
         <p:spPr>
           <a:xfrm>
-            <a:off x="944763" y="10020300"/>
-            <a:ext cx="5802510" cy="14738352"/>
+            <a:off x="1511621" y="12024360"/>
+            <a:ext cx="9284016" cy="17686022"/>
           </a:xfrm>
         </p:spPr>
         <p:txBody>
@@ -1481,8 +1481,8 @@
         </p:nvSpPr>
         <p:spPr>
           <a:xfrm>
-            <a:off x="6943726" y="6724652"/>
-            <a:ext cx="5831087" cy="3295648"/>
+            <a:off x="11109961" y="8069582"/>
+            <a:ext cx="9329738" cy="3954778"/>
           </a:xfrm>
         </p:spPr>
         <p:txBody>
@@ -1490,39 +1490,39 @@
           <a:lstStyle>
             <a:lvl1pPr marL="0" indent="0">
               <a:buNone/>
-              <a:defRPr sz="3600" b="1"/>
+              <a:defRPr sz="5760" b="1"/>
             </a:lvl1pPr>
-            <a:lvl2pPr marL="685800" indent="0">
+            <a:lvl2pPr marL="1097280" indent="0">
               <a:buNone/>
-              <a:defRPr sz="3000" b="1"/>
+              <a:defRPr sz="4800" b="1"/>
             </a:lvl2pPr>
-            <a:lvl3pPr marL="1371600" indent="0">
+            <a:lvl3pPr marL="2194560" indent="0">
               <a:buNone/>
-              <a:defRPr sz="2700" b="1"/>
+              <a:defRPr sz="4320" b="1"/>
             </a:lvl3pPr>
-            <a:lvl4pPr marL="2057400" indent="0">
+            <a:lvl4pPr marL="3291840" indent="0">
               <a:buNone/>
-              <a:defRPr sz="2400" b="1"/>
+              <a:defRPr sz="3840" b="1"/>
             </a:lvl4pPr>
-            <a:lvl5pPr marL="2743200" indent="0">
+            <a:lvl5pPr marL="4389120" indent="0">
               <a:buNone/>
-              <a:defRPr sz="2400" b="1"/>
+              <a:defRPr sz="3840" b="1"/>
             </a:lvl5pPr>
-            <a:lvl6pPr marL="3429000" indent="0">
+            <a:lvl6pPr marL="5486400" indent="0">
               <a:buNone/>
-              <a:defRPr sz="2400" b="1"/>
+              <a:defRPr sz="3840" b="1"/>
             </a:lvl6pPr>
-            <a:lvl7pPr marL="4114800" indent="0">
+            <a:lvl7pPr marL="6583680" indent="0">
               <a:buNone/>
-              <a:defRPr sz="2400" b="1"/>
+              <a:defRPr sz="3840" b="1"/>
             </a:lvl7pPr>
-            <a:lvl8pPr marL="4800600" indent="0">
+            <a:lvl8pPr marL="7680960" indent="0">
               <a:buNone/>
-              <a:defRPr sz="2400" b="1"/>
+              <a:defRPr sz="3840" b="1"/>
             </a:lvl8pPr>
-            <a:lvl9pPr marL="5486400" indent="0">
+            <a:lvl9pPr marL="8778240" indent="0">
               <a:buNone/>
-              <a:defRPr sz="2400" b="1"/>
+              <a:defRPr sz="3840" b="1"/>
             </a:lvl9pPr>
           </a:lstStyle>
           <a:p>
@@ -1546,8 +1546,8 @@
         </p:nvSpPr>
         <p:spPr>
           <a:xfrm>
-            <a:off x="6943726" y="10020300"/>
-            <a:ext cx="5831087" cy="14738352"/>
+            <a:off x="11109961" y="12024360"/>
+            <a:ext cx="9329738" cy="17686022"/>
           </a:xfrm>
         </p:spPr>
         <p:txBody>
@@ -1659,7 +1659,7 @@
     </p:spTree>
     <p:extLst>
       <p:ext uri="{BB962C8B-B14F-4D97-AF65-F5344CB8AC3E}">
-        <p14:creationId xmlns:p14="http://schemas.microsoft.com/office/powerpoint/2010/main" val="3732564792"/>
+        <p14:creationId xmlns:p14="http://schemas.microsoft.com/office/powerpoint/2010/main" val="243422295"/>
       </p:ext>
     </p:extLst>
   </p:cSld>
@@ -1777,7 +1777,7 @@
     </p:spTree>
     <p:extLst>
       <p:ext uri="{BB962C8B-B14F-4D97-AF65-F5344CB8AC3E}">
-        <p14:creationId xmlns:p14="http://schemas.microsoft.com/office/powerpoint/2010/main" val="3603766489"/>
+        <p14:creationId xmlns:p14="http://schemas.microsoft.com/office/powerpoint/2010/main" val="3269774560"/>
       </p:ext>
     </p:extLst>
   </p:cSld>
@@ -1872,7 +1872,7 @@
     </p:spTree>
     <p:extLst>
       <p:ext uri="{BB962C8B-B14F-4D97-AF65-F5344CB8AC3E}">
-        <p14:creationId xmlns:p14="http://schemas.microsoft.com/office/powerpoint/2010/main" val="1320071013"/>
+        <p14:creationId xmlns:p14="http://schemas.microsoft.com/office/powerpoint/2010/main" val="1310225103"/>
       </p:ext>
     </p:extLst>
   </p:cSld>
@@ -1911,15 +1911,15 @@
         </p:nvSpPr>
         <p:spPr>
           <a:xfrm>
-            <a:off x="944762" y="1828800"/>
-            <a:ext cx="4423767" cy="6400800"/>
+            <a:off x="1511619" y="2194560"/>
+            <a:ext cx="7078027" cy="7680960"/>
           </a:xfrm>
         </p:spPr>
         <p:txBody>
           <a:bodyPr anchor="b"/>
           <a:lstStyle>
             <a:lvl1pPr>
-              <a:defRPr sz="4800"/>
+              <a:defRPr sz="7680"/>
             </a:lvl1pPr>
           </a:lstStyle>
           <a:p>
@@ -1943,39 +1943,39 @@
         </p:nvSpPr>
         <p:spPr>
           <a:xfrm>
-            <a:off x="5831087" y="3949706"/>
-            <a:ext cx="6943725" cy="19494500"/>
+            <a:off x="9329738" y="4739647"/>
+            <a:ext cx="11109960" cy="23393400"/>
           </a:xfrm>
         </p:spPr>
         <p:txBody>
           <a:bodyPr/>
           <a:lstStyle>
             <a:lvl1pPr>
-              <a:defRPr sz="4800"/>
+              <a:defRPr sz="7680"/>
             </a:lvl1pPr>
             <a:lvl2pPr>
-              <a:defRPr sz="4200"/>
+              <a:defRPr sz="6720"/>
             </a:lvl2pPr>
             <a:lvl3pPr>
-              <a:defRPr sz="3600"/>
+              <a:defRPr sz="5760"/>
             </a:lvl3pPr>
             <a:lvl4pPr>
-              <a:defRPr sz="3000"/>
+              <a:defRPr sz="4800"/>
             </a:lvl4pPr>
             <a:lvl5pPr>
-              <a:defRPr sz="3000"/>
+              <a:defRPr sz="4800"/>
             </a:lvl5pPr>
             <a:lvl6pPr>
-              <a:defRPr sz="3000"/>
+              <a:defRPr sz="4800"/>
             </a:lvl6pPr>
             <a:lvl7pPr>
-              <a:defRPr sz="3000"/>
+              <a:defRPr sz="4800"/>
             </a:lvl7pPr>
             <a:lvl8pPr>
-              <a:defRPr sz="3000"/>
+              <a:defRPr sz="4800"/>
             </a:lvl8pPr>
             <a:lvl9pPr>
-              <a:defRPr sz="3000"/>
+              <a:defRPr sz="4800"/>
             </a:lvl9pPr>
           </a:lstStyle>
           <a:p>
@@ -2028,8 +2028,8 @@
         </p:nvSpPr>
         <p:spPr>
           <a:xfrm>
-            <a:off x="944762" y="8229600"/>
-            <a:ext cx="4423767" cy="15246352"/>
+            <a:off x="1511619" y="9875520"/>
+            <a:ext cx="7078027" cy="18295622"/>
           </a:xfrm>
         </p:spPr>
         <p:txBody>
@@ -2037,39 +2037,39 @@
           <a:lstStyle>
             <a:lvl1pPr marL="0" indent="0">
               <a:buNone/>
+              <a:defRPr sz="3840"/>
+            </a:lvl1pPr>
+            <a:lvl2pPr marL="1097280" indent="0">
+              <a:buNone/>
+              <a:defRPr sz="3360"/>
+            </a:lvl2pPr>
+            <a:lvl3pPr marL="2194560" indent="0">
+              <a:buNone/>
+              <a:defRPr sz="2880"/>
+            </a:lvl3pPr>
+            <a:lvl4pPr marL="3291840" indent="0">
+              <a:buNone/>
               <a:defRPr sz="2400"/>
-            </a:lvl1pPr>
-            <a:lvl2pPr marL="685800" indent="0">
+            </a:lvl4pPr>
+            <a:lvl5pPr marL="4389120" indent="0">
               <a:buNone/>
-              <a:defRPr sz="2100"/>
-            </a:lvl2pPr>
-            <a:lvl3pPr marL="1371600" indent="0">
+              <a:defRPr sz="2400"/>
+            </a:lvl5pPr>
+            <a:lvl6pPr marL="5486400" indent="0">
               <a:buNone/>
-              <a:defRPr sz="1800"/>
-            </a:lvl3pPr>
-            <a:lvl4pPr marL="2057400" indent="0">
+              <a:defRPr sz="2400"/>
+            </a:lvl6pPr>
+            <a:lvl7pPr marL="6583680" indent="0">
               <a:buNone/>
-              <a:defRPr sz="1500"/>
-            </a:lvl4pPr>
-            <a:lvl5pPr marL="2743200" indent="0">
+              <a:defRPr sz="2400"/>
+            </a:lvl7pPr>
+            <a:lvl8pPr marL="7680960" indent="0">
               <a:buNone/>
-              <a:defRPr sz="1500"/>
-            </a:lvl5pPr>
-            <a:lvl6pPr marL="3429000" indent="0">
+              <a:defRPr sz="2400"/>
+            </a:lvl8pPr>
+            <a:lvl9pPr marL="8778240" indent="0">
               <a:buNone/>
-              <a:defRPr sz="1500"/>
-            </a:lvl6pPr>
-            <a:lvl7pPr marL="4114800" indent="0">
-              <a:buNone/>
-              <a:defRPr sz="1500"/>
-            </a:lvl7pPr>
-            <a:lvl8pPr marL="4800600" indent="0">
-              <a:buNone/>
-              <a:defRPr sz="1500"/>
-            </a:lvl8pPr>
-            <a:lvl9pPr marL="5486400" indent="0">
-              <a:buNone/>
-              <a:defRPr sz="1500"/>
+              <a:defRPr sz="2400"/>
             </a:lvl9pPr>
           </a:lstStyle>
           <a:p>
@@ -2149,7 +2149,7 @@
     </p:spTree>
     <p:extLst>
       <p:ext uri="{BB962C8B-B14F-4D97-AF65-F5344CB8AC3E}">
-        <p14:creationId xmlns:p14="http://schemas.microsoft.com/office/powerpoint/2010/main" val="4096873944"/>
+        <p14:creationId xmlns:p14="http://schemas.microsoft.com/office/powerpoint/2010/main" val="2665194848"/>
       </p:ext>
     </p:extLst>
   </p:cSld>
@@ -2188,15 +2188,15 @@
         </p:nvSpPr>
         <p:spPr>
           <a:xfrm>
-            <a:off x="944762" y="1828800"/>
-            <a:ext cx="4423767" cy="6400800"/>
+            <a:off x="1511619" y="2194560"/>
+            <a:ext cx="7078027" cy="7680960"/>
           </a:xfrm>
         </p:spPr>
         <p:txBody>
           <a:bodyPr anchor="b"/>
           <a:lstStyle>
             <a:lvl1pPr>
-              <a:defRPr sz="4800"/>
+              <a:defRPr sz="7680"/>
             </a:lvl1pPr>
           </a:lstStyle>
           <a:p>
@@ -2220,8 +2220,8 @@
         </p:nvSpPr>
         <p:spPr>
           <a:xfrm>
-            <a:off x="5831087" y="3949706"/>
-            <a:ext cx="6943725" cy="19494500"/>
+            <a:off x="9329738" y="4739647"/>
+            <a:ext cx="11109960" cy="23393400"/>
           </a:xfrm>
         </p:spPr>
         <p:txBody>
@@ -2229,39 +2229,39 @@
           <a:lstStyle>
             <a:lvl1pPr marL="0" indent="0">
               <a:buNone/>
+              <a:defRPr sz="7680"/>
+            </a:lvl1pPr>
+            <a:lvl2pPr marL="1097280" indent="0">
+              <a:buNone/>
+              <a:defRPr sz="6720"/>
+            </a:lvl2pPr>
+            <a:lvl3pPr marL="2194560" indent="0">
+              <a:buNone/>
+              <a:defRPr sz="5760"/>
+            </a:lvl3pPr>
+            <a:lvl4pPr marL="3291840" indent="0">
+              <a:buNone/>
               <a:defRPr sz="4800"/>
-            </a:lvl1pPr>
-            <a:lvl2pPr marL="685800" indent="0">
+            </a:lvl4pPr>
+            <a:lvl5pPr marL="4389120" indent="0">
               <a:buNone/>
-              <a:defRPr sz="4200"/>
-            </a:lvl2pPr>
-            <a:lvl3pPr marL="1371600" indent="0">
+              <a:defRPr sz="4800"/>
+            </a:lvl5pPr>
+            <a:lvl6pPr marL="5486400" indent="0">
               <a:buNone/>
-              <a:defRPr sz="3600"/>
-            </a:lvl3pPr>
-            <a:lvl4pPr marL="2057400" indent="0">
+              <a:defRPr sz="4800"/>
+            </a:lvl6pPr>
+            <a:lvl7pPr marL="6583680" indent="0">
               <a:buNone/>
-              <a:defRPr sz="3000"/>
-            </a:lvl4pPr>
-            <a:lvl5pPr marL="2743200" indent="0">
+              <a:defRPr sz="4800"/>
+            </a:lvl7pPr>
+            <a:lvl8pPr marL="7680960" indent="0">
               <a:buNone/>
-              <a:defRPr sz="3000"/>
-            </a:lvl5pPr>
-            <a:lvl6pPr marL="3429000" indent="0">
+              <a:defRPr sz="4800"/>
+            </a:lvl8pPr>
+            <a:lvl9pPr marL="8778240" indent="0">
               <a:buNone/>
-              <a:defRPr sz="3000"/>
-            </a:lvl6pPr>
-            <a:lvl7pPr marL="4114800" indent="0">
-              <a:buNone/>
-              <a:defRPr sz="3000"/>
-            </a:lvl7pPr>
-            <a:lvl8pPr marL="4800600" indent="0">
-              <a:buNone/>
-              <a:defRPr sz="3000"/>
-            </a:lvl8pPr>
-            <a:lvl9pPr marL="5486400" indent="0">
-              <a:buNone/>
-              <a:defRPr sz="3000"/>
+              <a:defRPr sz="4800"/>
             </a:lvl9pPr>
           </a:lstStyle>
           <a:p>
@@ -2285,8 +2285,8 @@
         </p:nvSpPr>
         <p:spPr>
           <a:xfrm>
-            <a:off x="944762" y="8229600"/>
-            <a:ext cx="4423767" cy="15246352"/>
+            <a:off x="1511619" y="9875520"/>
+            <a:ext cx="7078027" cy="18295622"/>
           </a:xfrm>
         </p:spPr>
         <p:txBody>
@@ -2294,39 +2294,39 @@
           <a:lstStyle>
             <a:lvl1pPr marL="0" indent="0">
               <a:buNone/>
+              <a:defRPr sz="3840"/>
+            </a:lvl1pPr>
+            <a:lvl2pPr marL="1097280" indent="0">
+              <a:buNone/>
+              <a:defRPr sz="3360"/>
+            </a:lvl2pPr>
+            <a:lvl3pPr marL="2194560" indent="0">
+              <a:buNone/>
+              <a:defRPr sz="2880"/>
+            </a:lvl3pPr>
+            <a:lvl4pPr marL="3291840" indent="0">
+              <a:buNone/>
               <a:defRPr sz="2400"/>
-            </a:lvl1pPr>
-            <a:lvl2pPr marL="685800" indent="0">
+            </a:lvl4pPr>
+            <a:lvl5pPr marL="4389120" indent="0">
               <a:buNone/>
-              <a:defRPr sz="2100"/>
-            </a:lvl2pPr>
-            <a:lvl3pPr marL="1371600" indent="0">
+              <a:defRPr sz="2400"/>
+            </a:lvl5pPr>
+            <a:lvl6pPr marL="5486400" indent="0">
               <a:buNone/>
-              <a:defRPr sz="1800"/>
-            </a:lvl3pPr>
-            <a:lvl4pPr marL="2057400" indent="0">
+              <a:defRPr sz="2400"/>
+            </a:lvl6pPr>
+            <a:lvl7pPr marL="6583680" indent="0">
               <a:buNone/>
-              <a:defRPr sz="1500"/>
-            </a:lvl4pPr>
-            <a:lvl5pPr marL="2743200" indent="0">
+              <a:defRPr sz="2400"/>
+            </a:lvl7pPr>
+            <a:lvl8pPr marL="7680960" indent="0">
               <a:buNone/>
-              <a:defRPr sz="1500"/>
-            </a:lvl5pPr>
-            <a:lvl6pPr marL="3429000" indent="0">
+              <a:defRPr sz="2400"/>
+            </a:lvl8pPr>
+            <a:lvl9pPr marL="8778240" indent="0">
               <a:buNone/>
-              <a:defRPr sz="1500"/>
-            </a:lvl6pPr>
-            <a:lvl7pPr marL="4114800" indent="0">
-              <a:buNone/>
-              <a:defRPr sz="1500"/>
-            </a:lvl7pPr>
-            <a:lvl8pPr marL="4800600" indent="0">
-              <a:buNone/>
-              <a:defRPr sz="1500"/>
-            </a:lvl8pPr>
-            <a:lvl9pPr marL="5486400" indent="0">
-              <a:buNone/>
-              <a:defRPr sz="1500"/>
+              <a:defRPr sz="2400"/>
             </a:lvl9pPr>
           </a:lstStyle>
           <a:p>
@@ -2406,7 +2406,7 @@
     </p:spTree>
     <p:extLst>
       <p:ext uri="{BB962C8B-B14F-4D97-AF65-F5344CB8AC3E}">
-        <p14:creationId xmlns:p14="http://schemas.microsoft.com/office/powerpoint/2010/main" val="1170571484"/>
+        <p14:creationId xmlns:p14="http://schemas.microsoft.com/office/powerpoint/2010/main" val="4008993476"/>
       </p:ext>
     </p:extLst>
   </p:cSld>
@@ -2450,8 +2450,8 @@
         </p:nvSpPr>
         <p:spPr>
           <a:xfrm>
-            <a:off x="942975" y="1460506"/>
-            <a:ext cx="11830050" cy="5302252"/>
+            <a:off x="1508760" y="1752607"/>
+            <a:ext cx="18928080" cy="6362702"/>
           </a:xfrm>
           <a:prstGeom prst="rect">
             <a:avLst/>
@@ -2483,8 +2483,8 @@
         </p:nvSpPr>
         <p:spPr>
           <a:xfrm>
-            <a:off x="942975" y="7302500"/>
-            <a:ext cx="11830050" cy="17405352"/>
+            <a:off x="1508760" y="8763000"/>
+            <a:ext cx="18928080" cy="20886422"/>
           </a:xfrm>
           <a:prstGeom prst="rect">
             <a:avLst/>
@@ -2545,8 +2545,8 @@
         </p:nvSpPr>
         <p:spPr>
           <a:xfrm>
-            <a:off x="942975" y="25425406"/>
-            <a:ext cx="3086100" cy="1460500"/>
+            <a:off x="1508760" y="30510487"/>
+            <a:ext cx="4937760" cy="1752600"/>
           </a:xfrm>
           <a:prstGeom prst="rect">
             <a:avLst/>
@@ -2556,7 +2556,7 @@
           <a:bodyPr vert="horz" lIns="91440" tIns="45720" rIns="91440" bIns="45720" rtlCol="0" anchor="ctr"/>
           <a:lstStyle>
             <a:lvl1pPr algn="l">
-              <a:defRPr sz="1800">
+              <a:defRPr sz="2880">
                 <a:solidFill>
                   <a:schemeClr val="tx1">
                     <a:tint val="82000"/>
@@ -2586,8 +2586,8 @@
         </p:nvSpPr>
         <p:spPr>
           <a:xfrm>
-            <a:off x="4543425" y="25425406"/>
-            <a:ext cx="4629150" cy="1460500"/>
+            <a:off x="7269480" y="30510487"/>
+            <a:ext cx="7406640" cy="1752600"/>
           </a:xfrm>
           <a:prstGeom prst="rect">
             <a:avLst/>
@@ -2597,7 +2597,7 @@
           <a:bodyPr vert="horz" lIns="91440" tIns="45720" rIns="91440" bIns="45720" rtlCol="0" anchor="ctr"/>
           <a:lstStyle>
             <a:lvl1pPr algn="ctr">
-              <a:defRPr sz="1800">
+              <a:defRPr sz="2880">
                 <a:solidFill>
                   <a:schemeClr val="tx1">
                     <a:tint val="82000"/>
@@ -2623,8 +2623,8 @@
         </p:nvSpPr>
         <p:spPr>
           <a:xfrm>
-            <a:off x="9686925" y="25425406"/>
-            <a:ext cx="3086100" cy="1460500"/>
+            <a:off x="15499080" y="30510487"/>
+            <a:ext cx="4937760" cy="1752600"/>
           </a:xfrm>
           <a:prstGeom prst="rect">
             <a:avLst/>
@@ -2634,7 +2634,7 @@
           <a:bodyPr vert="horz" lIns="91440" tIns="45720" rIns="91440" bIns="45720" rtlCol="0" anchor="ctr"/>
           <a:lstStyle>
             <a:lvl1pPr algn="r">
-              <a:defRPr sz="1800">
+              <a:defRPr sz="2880">
                 <a:solidFill>
                   <a:schemeClr val="tx1">
                     <a:tint val="82000"/>
@@ -2655,27 +2655,27 @@
     </p:spTree>
     <p:extLst>
       <p:ext uri="{BB962C8B-B14F-4D97-AF65-F5344CB8AC3E}">
-        <p14:creationId xmlns:p14="http://schemas.microsoft.com/office/powerpoint/2010/main" val="1095047691"/>
+        <p14:creationId xmlns:p14="http://schemas.microsoft.com/office/powerpoint/2010/main" val="1327068997"/>
       </p:ext>
     </p:extLst>
   </p:cSld>
   <p:clrMap bg1="lt1" tx1="dk1" bg2="lt2" tx2="dk2" accent1="accent1" accent2="accent2" accent3="accent3" accent4="accent4" accent5="accent5" accent6="accent6" hlink="hlink" folHlink="folHlink"/>
   <p:sldLayoutIdLst>
-    <p:sldLayoutId id="2147483697" r:id="rId1"/>
-    <p:sldLayoutId id="2147483698" r:id="rId2"/>
-    <p:sldLayoutId id="2147483699" r:id="rId3"/>
-    <p:sldLayoutId id="2147483700" r:id="rId4"/>
-    <p:sldLayoutId id="2147483701" r:id="rId5"/>
-    <p:sldLayoutId id="2147483702" r:id="rId6"/>
-    <p:sldLayoutId id="2147483703" r:id="rId7"/>
-    <p:sldLayoutId id="2147483704" r:id="rId8"/>
-    <p:sldLayoutId id="2147483705" r:id="rId9"/>
-    <p:sldLayoutId id="2147483706" r:id="rId10"/>
-    <p:sldLayoutId id="2147483707" r:id="rId11"/>
+    <p:sldLayoutId id="2147483709" r:id="rId1"/>
+    <p:sldLayoutId id="2147483710" r:id="rId2"/>
+    <p:sldLayoutId id="2147483711" r:id="rId3"/>
+    <p:sldLayoutId id="2147483712" r:id="rId4"/>
+    <p:sldLayoutId id="2147483713" r:id="rId5"/>
+    <p:sldLayoutId id="2147483714" r:id="rId6"/>
+    <p:sldLayoutId id="2147483715" r:id="rId7"/>
+    <p:sldLayoutId id="2147483716" r:id="rId8"/>
+    <p:sldLayoutId id="2147483717" r:id="rId9"/>
+    <p:sldLayoutId id="2147483718" r:id="rId10"/>
+    <p:sldLayoutId id="2147483719" r:id="rId11"/>
   </p:sldLayoutIdLst>
   <p:txStyles>
     <p:titleStyle>
-      <a:lvl1pPr algn="l" defTabSz="1371600" rtl="0" eaLnBrk="1" latinLnBrk="0" hangingPunct="1">
+      <a:lvl1pPr algn="l" defTabSz="2194560" rtl="0" eaLnBrk="1" latinLnBrk="0" hangingPunct="1">
         <a:lnSpc>
           <a:spcPct val="90000"/>
         </a:lnSpc>
@@ -2683,7 +2683,7 @@
           <a:spcPct val="0"/>
         </a:spcBef>
         <a:buNone/>
-        <a:defRPr sz="6600" kern="1200">
+        <a:defRPr sz="10560" kern="1200">
           <a:solidFill>
             <a:schemeClr val="tx1"/>
           </a:solidFill>
@@ -2694,16 +2694,16 @@
       </a:lvl1pPr>
     </p:titleStyle>
     <p:bodyStyle>
-      <a:lvl1pPr marL="342900" indent="-342900" algn="l" defTabSz="1371600" rtl="0" eaLnBrk="1" latinLnBrk="0" hangingPunct="1">
+      <a:lvl1pPr marL="548640" indent="-548640" algn="l" defTabSz="2194560" rtl="0" eaLnBrk="1" latinLnBrk="0" hangingPunct="1">
         <a:lnSpc>
           <a:spcPct val="90000"/>
         </a:lnSpc>
         <a:spcBef>
-          <a:spcPts val="1500"/>
+          <a:spcPts val="2400"/>
         </a:spcBef>
         <a:buFont typeface="Arial" panose="020B0604020202020204" pitchFamily="34" charset="0"/>
         <a:buChar char="•"/>
-        <a:defRPr sz="4200" kern="1200">
+        <a:defRPr sz="6720" kern="1200">
           <a:solidFill>
             <a:schemeClr val="tx1"/>
           </a:solidFill>
@@ -2712,16 +2712,16 @@
           <a:cs typeface="+mn-cs"/>
         </a:defRPr>
       </a:lvl1pPr>
-      <a:lvl2pPr marL="1028700" indent="-342900" algn="l" defTabSz="1371600" rtl="0" eaLnBrk="1" latinLnBrk="0" hangingPunct="1">
+      <a:lvl2pPr marL="1645920" indent="-548640" algn="l" defTabSz="2194560" rtl="0" eaLnBrk="1" latinLnBrk="0" hangingPunct="1">
         <a:lnSpc>
           <a:spcPct val="90000"/>
         </a:lnSpc>
         <a:spcBef>
-          <a:spcPts val="750"/>
+          <a:spcPts val="1200"/>
         </a:spcBef>
         <a:buFont typeface="Arial" panose="020B0604020202020204" pitchFamily="34" charset="0"/>
         <a:buChar char="•"/>
-        <a:defRPr sz="3600" kern="1200">
+        <a:defRPr sz="5760" kern="1200">
           <a:solidFill>
             <a:schemeClr val="tx1"/>
           </a:solidFill>
@@ -2730,16 +2730,16 @@
           <a:cs typeface="+mn-cs"/>
         </a:defRPr>
       </a:lvl2pPr>
-      <a:lvl3pPr marL="1714500" indent="-342900" algn="l" defTabSz="1371600" rtl="0" eaLnBrk="1" latinLnBrk="0" hangingPunct="1">
+      <a:lvl3pPr marL="2743200" indent="-548640" algn="l" defTabSz="2194560" rtl="0" eaLnBrk="1" latinLnBrk="0" hangingPunct="1">
         <a:lnSpc>
           <a:spcPct val="90000"/>
         </a:lnSpc>
         <a:spcBef>
-          <a:spcPts val="750"/>
+          <a:spcPts val="1200"/>
         </a:spcBef>
         <a:buFont typeface="Arial" panose="020B0604020202020204" pitchFamily="34" charset="0"/>
         <a:buChar char="•"/>
-        <a:defRPr sz="3000" kern="1200">
+        <a:defRPr sz="4800" kern="1200">
           <a:solidFill>
             <a:schemeClr val="tx1"/>
           </a:solidFill>
@@ -2748,16 +2748,16 @@
           <a:cs typeface="+mn-cs"/>
         </a:defRPr>
       </a:lvl3pPr>
-      <a:lvl4pPr marL="2400300" indent="-342900" algn="l" defTabSz="1371600" rtl="0" eaLnBrk="1" latinLnBrk="0" hangingPunct="1">
+      <a:lvl4pPr marL="3840480" indent="-548640" algn="l" defTabSz="2194560" rtl="0" eaLnBrk="1" latinLnBrk="0" hangingPunct="1">
         <a:lnSpc>
           <a:spcPct val="90000"/>
         </a:lnSpc>
         <a:spcBef>
-          <a:spcPts val="750"/>
+          <a:spcPts val="1200"/>
         </a:spcBef>
         <a:buFont typeface="Arial" panose="020B0604020202020204" pitchFamily="34" charset="0"/>
         <a:buChar char="•"/>
-        <a:defRPr sz="2700" kern="1200">
+        <a:defRPr sz="4320" kern="1200">
           <a:solidFill>
             <a:schemeClr val="tx1"/>
           </a:solidFill>
@@ -2766,16 +2766,16 @@
           <a:cs typeface="+mn-cs"/>
         </a:defRPr>
       </a:lvl4pPr>
-      <a:lvl5pPr marL="3086100" indent="-342900" algn="l" defTabSz="1371600" rtl="0" eaLnBrk="1" latinLnBrk="0" hangingPunct="1">
+      <a:lvl5pPr marL="4937760" indent="-548640" algn="l" defTabSz="2194560" rtl="0" eaLnBrk="1" latinLnBrk="0" hangingPunct="1">
         <a:lnSpc>
           <a:spcPct val="90000"/>
         </a:lnSpc>
         <a:spcBef>
-          <a:spcPts val="750"/>
+          <a:spcPts val="1200"/>
         </a:spcBef>
         <a:buFont typeface="Arial" panose="020B0604020202020204" pitchFamily="34" charset="0"/>
         <a:buChar char="•"/>
-        <a:defRPr sz="2700" kern="1200">
+        <a:defRPr sz="4320" kern="1200">
           <a:solidFill>
             <a:schemeClr val="tx1"/>
           </a:solidFill>
@@ -2784,16 +2784,16 @@
           <a:cs typeface="+mn-cs"/>
         </a:defRPr>
       </a:lvl5pPr>
-      <a:lvl6pPr marL="3771900" indent="-342900" algn="l" defTabSz="1371600" rtl="0" eaLnBrk="1" latinLnBrk="0" hangingPunct="1">
+      <a:lvl6pPr marL="6035040" indent="-548640" algn="l" defTabSz="2194560" rtl="0" eaLnBrk="1" latinLnBrk="0" hangingPunct="1">
         <a:lnSpc>
           <a:spcPct val="90000"/>
         </a:lnSpc>
         <a:spcBef>
-          <a:spcPts val="750"/>
+          <a:spcPts val="1200"/>
         </a:spcBef>
         <a:buFont typeface="Arial" panose="020B0604020202020204" pitchFamily="34" charset="0"/>
         <a:buChar char="•"/>
-        <a:defRPr sz="2700" kern="1200">
+        <a:defRPr sz="4320" kern="1200">
           <a:solidFill>
             <a:schemeClr val="tx1"/>
           </a:solidFill>
@@ -2802,16 +2802,16 @@
           <a:cs typeface="+mn-cs"/>
         </a:defRPr>
       </a:lvl6pPr>
-      <a:lvl7pPr marL="4457700" indent="-342900" algn="l" defTabSz="1371600" rtl="0" eaLnBrk="1" latinLnBrk="0" hangingPunct="1">
+      <a:lvl7pPr marL="7132320" indent="-548640" algn="l" defTabSz="2194560" rtl="0" eaLnBrk="1" latinLnBrk="0" hangingPunct="1">
         <a:lnSpc>
           <a:spcPct val="90000"/>
         </a:lnSpc>
         <a:spcBef>
-          <a:spcPts val="750"/>
+          <a:spcPts val="1200"/>
         </a:spcBef>
         <a:buFont typeface="Arial" panose="020B0604020202020204" pitchFamily="34" charset="0"/>
         <a:buChar char="•"/>
-        <a:defRPr sz="2700" kern="1200">
+        <a:defRPr sz="4320" kern="1200">
           <a:solidFill>
             <a:schemeClr val="tx1"/>
           </a:solidFill>
@@ -2820,16 +2820,16 @@
           <a:cs typeface="+mn-cs"/>
         </a:defRPr>
       </a:lvl7pPr>
-      <a:lvl8pPr marL="5143500" indent="-342900" algn="l" defTabSz="1371600" rtl="0" eaLnBrk="1" latinLnBrk="0" hangingPunct="1">
+      <a:lvl8pPr marL="8229600" indent="-548640" algn="l" defTabSz="2194560" rtl="0" eaLnBrk="1" latinLnBrk="0" hangingPunct="1">
         <a:lnSpc>
           <a:spcPct val="90000"/>
         </a:lnSpc>
         <a:spcBef>
-          <a:spcPts val="750"/>
+          <a:spcPts val="1200"/>
         </a:spcBef>
         <a:buFont typeface="Arial" panose="020B0604020202020204" pitchFamily="34" charset="0"/>
         <a:buChar char="•"/>
-        <a:defRPr sz="2700" kern="1200">
+        <a:defRPr sz="4320" kern="1200">
           <a:solidFill>
             <a:schemeClr val="tx1"/>
           </a:solidFill>
@@ -2838,16 +2838,16 @@
           <a:cs typeface="+mn-cs"/>
         </a:defRPr>
       </a:lvl8pPr>
-      <a:lvl9pPr marL="5829300" indent="-342900" algn="l" defTabSz="1371600" rtl="0" eaLnBrk="1" latinLnBrk="0" hangingPunct="1">
+      <a:lvl9pPr marL="9326880" indent="-548640" algn="l" defTabSz="2194560" rtl="0" eaLnBrk="1" latinLnBrk="0" hangingPunct="1">
         <a:lnSpc>
           <a:spcPct val="90000"/>
         </a:lnSpc>
         <a:spcBef>
-          <a:spcPts val="750"/>
+          <a:spcPts val="1200"/>
         </a:spcBef>
         <a:buFont typeface="Arial" panose="020B0604020202020204" pitchFamily="34" charset="0"/>
         <a:buChar char="•"/>
-        <a:defRPr sz="2700" kern="1200">
+        <a:defRPr sz="4320" kern="1200">
           <a:solidFill>
             <a:schemeClr val="tx1"/>
           </a:solidFill>
@@ -2861,8 +2861,8 @@
       <a:defPPr>
         <a:defRPr lang="en-US"/>
       </a:defPPr>
-      <a:lvl1pPr marL="0" algn="l" defTabSz="1371600" rtl="0" eaLnBrk="1" latinLnBrk="0" hangingPunct="1">
-        <a:defRPr sz="2700" kern="1200">
+      <a:lvl1pPr marL="0" algn="l" defTabSz="2194560" rtl="0" eaLnBrk="1" latinLnBrk="0" hangingPunct="1">
+        <a:defRPr sz="4320" kern="1200">
           <a:solidFill>
             <a:schemeClr val="tx1"/>
           </a:solidFill>
@@ -2871,8 +2871,8 @@
           <a:cs typeface="+mn-cs"/>
         </a:defRPr>
       </a:lvl1pPr>
-      <a:lvl2pPr marL="685800" algn="l" defTabSz="1371600" rtl="0" eaLnBrk="1" latinLnBrk="0" hangingPunct="1">
-        <a:defRPr sz="2700" kern="1200">
+      <a:lvl2pPr marL="1097280" algn="l" defTabSz="2194560" rtl="0" eaLnBrk="1" latinLnBrk="0" hangingPunct="1">
+        <a:defRPr sz="4320" kern="1200">
           <a:solidFill>
             <a:schemeClr val="tx1"/>
           </a:solidFill>
@@ -2881,8 +2881,8 @@
           <a:cs typeface="+mn-cs"/>
         </a:defRPr>
       </a:lvl2pPr>
-      <a:lvl3pPr marL="1371600" algn="l" defTabSz="1371600" rtl="0" eaLnBrk="1" latinLnBrk="0" hangingPunct="1">
-        <a:defRPr sz="2700" kern="1200">
+      <a:lvl3pPr marL="2194560" algn="l" defTabSz="2194560" rtl="0" eaLnBrk="1" latinLnBrk="0" hangingPunct="1">
+        <a:defRPr sz="4320" kern="1200">
           <a:solidFill>
             <a:schemeClr val="tx1"/>
           </a:solidFill>
@@ -2891,8 +2891,8 @@
           <a:cs typeface="+mn-cs"/>
         </a:defRPr>
       </a:lvl3pPr>
-      <a:lvl4pPr marL="2057400" algn="l" defTabSz="1371600" rtl="0" eaLnBrk="1" latinLnBrk="0" hangingPunct="1">
-        <a:defRPr sz="2700" kern="1200">
+      <a:lvl4pPr marL="3291840" algn="l" defTabSz="2194560" rtl="0" eaLnBrk="1" latinLnBrk="0" hangingPunct="1">
+        <a:defRPr sz="4320" kern="1200">
           <a:solidFill>
             <a:schemeClr val="tx1"/>
           </a:solidFill>
@@ -2901,8 +2901,8 @@
           <a:cs typeface="+mn-cs"/>
         </a:defRPr>
       </a:lvl4pPr>
-      <a:lvl5pPr marL="2743200" algn="l" defTabSz="1371600" rtl="0" eaLnBrk="1" latinLnBrk="0" hangingPunct="1">
-        <a:defRPr sz="2700" kern="1200">
+      <a:lvl5pPr marL="4389120" algn="l" defTabSz="2194560" rtl="0" eaLnBrk="1" latinLnBrk="0" hangingPunct="1">
+        <a:defRPr sz="4320" kern="1200">
           <a:solidFill>
             <a:schemeClr val="tx1"/>
           </a:solidFill>
@@ -2911,8 +2911,8 @@
           <a:cs typeface="+mn-cs"/>
         </a:defRPr>
       </a:lvl5pPr>
-      <a:lvl6pPr marL="3429000" algn="l" defTabSz="1371600" rtl="0" eaLnBrk="1" latinLnBrk="0" hangingPunct="1">
-        <a:defRPr sz="2700" kern="1200">
+      <a:lvl6pPr marL="5486400" algn="l" defTabSz="2194560" rtl="0" eaLnBrk="1" latinLnBrk="0" hangingPunct="1">
+        <a:defRPr sz="4320" kern="1200">
           <a:solidFill>
             <a:schemeClr val="tx1"/>
           </a:solidFill>
@@ -2921,8 +2921,8 @@
           <a:cs typeface="+mn-cs"/>
         </a:defRPr>
       </a:lvl6pPr>
-      <a:lvl7pPr marL="4114800" algn="l" defTabSz="1371600" rtl="0" eaLnBrk="1" latinLnBrk="0" hangingPunct="1">
-        <a:defRPr sz="2700" kern="1200">
+      <a:lvl7pPr marL="6583680" algn="l" defTabSz="2194560" rtl="0" eaLnBrk="1" latinLnBrk="0" hangingPunct="1">
+        <a:defRPr sz="4320" kern="1200">
           <a:solidFill>
             <a:schemeClr val="tx1"/>
           </a:solidFill>
@@ -2931,8 +2931,8 @@
           <a:cs typeface="+mn-cs"/>
         </a:defRPr>
       </a:lvl7pPr>
-      <a:lvl8pPr marL="4800600" algn="l" defTabSz="1371600" rtl="0" eaLnBrk="1" latinLnBrk="0" hangingPunct="1">
-        <a:defRPr sz="2700" kern="1200">
+      <a:lvl8pPr marL="7680960" algn="l" defTabSz="2194560" rtl="0" eaLnBrk="1" latinLnBrk="0" hangingPunct="1">
+        <a:defRPr sz="4320" kern="1200">
           <a:solidFill>
             <a:schemeClr val="tx1"/>
           </a:solidFill>
@@ -2941,8 +2941,8 @@
           <a:cs typeface="+mn-cs"/>
         </a:defRPr>
       </a:lvl8pPr>
-      <a:lvl9pPr marL="5486400" algn="l" defTabSz="1371600" rtl="0" eaLnBrk="1" latinLnBrk="0" hangingPunct="1">
-        <a:defRPr sz="2700" kern="1200">
+      <a:lvl9pPr marL="8778240" algn="l" defTabSz="2194560" rtl="0" eaLnBrk="1" latinLnBrk="0" hangingPunct="1">
+        <a:defRPr sz="4320" kern="1200">
           <a:solidFill>
             <a:schemeClr val="tx1"/>
           </a:solidFill>
@@ -2987,7 +2987,7 @@
         </p:nvSpPr>
         <p:spPr>
           <a:xfrm>
-            <a:off x="0" y="2230734"/>
+            <a:off x="4114800" y="4973934"/>
             <a:ext cx="13716000" cy="6176226"/>
           </a:xfrm>
           <a:prstGeom prst="rect">
@@ -3042,7 +3042,7 @@
         </p:nvSpPr>
         <p:spPr>
           <a:xfrm>
-            <a:off x="0" y="26350274"/>
+            <a:off x="4114800" y="29093474"/>
             <a:ext cx="13716000" cy="1116608"/>
           </a:xfrm>
           <a:prstGeom prst="rect">
@@ -3130,7 +3130,7 @@
         </p:nvSpPr>
         <p:spPr>
           <a:xfrm>
-            <a:off x="764088" y="374218"/>
+            <a:off x="4878888" y="3117419"/>
             <a:ext cx="12250454" cy="1015663"/>
           </a:xfrm>
           <a:prstGeom prst="rect">
@@ -3165,8 +3165,8 @@
         </p:nvSpPr>
         <p:spPr>
           <a:xfrm>
-            <a:off x="764088" y="1389881"/>
-            <a:ext cx="6676372" cy="646331"/>
+            <a:off x="4878888" y="4133082"/>
+            <a:ext cx="6676372" cy="1200329"/>
           </a:xfrm>
           <a:prstGeom prst="rect">
             <a:avLst/>
@@ -3219,8 +3219,8 @@
         </p:nvSpPr>
         <p:spPr>
           <a:xfrm>
-            <a:off x="764091" y="2432642"/>
-            <a:ext cx="11686783" cy="1477328"/>
+            <a:off x="4878892" y="5175842"/>
+            <a:ext cx="11686783" cy="2308324"/>
           </a:xfrm>
           <a:prstGeom prst="rect">
             <a:avLst/>
@@ -3288,7 +3288,7 @@
         </p:nvCxnSpPr>
         <p:spPr>
           <a:xfrm>
-            <a:off x="1014608" y="5898193"/>
+            <a:off x="5129408" y="8641393"/>
             <a:ext cx="7315200" cy="0"/>
           </a:xfrm>
           <a:prstGeom prst="line">
@@ -3329,8 +3329,8 @@
         </p:nvSpPr>
         <p:spPr>
           <a:xfrm>
-            <a:off x="7341400" y="6007692"/>
-            <a:ext cx="697700" cy="369332"/>
+            <a:off x="11456200" y="8750893"/>
+            <a:ext cx="697700" cy="830997"/>
           </a:xfrm>
           <a:prstGeom prst="rect">
             <a:avLst/>
@@ -3364,7 +3364,7 @@
         </p:nvCxnSpPr>
         <p:spPr>
           <a:xfrm>
-            <a:off x="7955280" y="6192358"/>
+            <a:off x="12070080" y="8935558"/>
             <a:ext cx="434340" cy="0"/>
           </a:xfrm>
           <a:prstGeom prst="straightConnector1">
@@ -3406,7 +3406,7 @@
         </p:nvSpPr>
         <p:spPr>
           <a:xfrm>
-            <a:off x="1084729" y="5354174"/>
+            <a:off x="5199529" y="8097375"/>
             <a:ext cx="1595718" cy="313741"/>
           </a:xfrm>
           <a:prstGeom prst="rect">
@@ -3455,7 +3455,7 @@
         </p:nvSpPr>
         <p:spPr>
           <a:xfrm>
-            <a:off x="3021106" y="4717679"/>
+            <a:off x="7135906" y="7460880"/>
             <a:ext cx="2115670" cy="385451"/>
           </a:xfrm>
           <a:prstGeom prst="rect">
@@ -3513,7 +3513,7 @@
         </p:nvSpPr>
         <p:spPr>
           <a:xfrm>
-            <a:off x="5970494" y="4161865"/>
+            <a:off x="10085294" y="6905065"/>
             <a:ext cx="2178424" cy="394436"/>
           </a:xfrm>
           <a:prstGeom prst="rect">
@@ -3562,7 +3562,7 @@
         </p:nvSpPr>
         <p:spPr>
           <a:xfrm>
-            <a:off x="5620871" y="4717679"/>
+            <a:off x="9735671" y="7460880"/>
             <a:ext cx="2178424" cy="394425"/>
           </a:xfrm>
           <a:prstGeom prst="rect">
@@ -3620,7 +3620,7 @@
         </p:nvSpPr>
         <p:spPr>
           <a:xfrm>
-            <a:off x="5378824" y="5354174"/>
+            <a:off x="9493624" y="8097375"/>
             <a:ext cx="2950984" cy="313729"/>
           </a:xfrm>
           <a:prstGeom prst="rect">
@@ -3681,7 +3681,7 @@
         </p:nvSpPr>
         <p:spPr>
           <a:xfrm>
-            <a:off x="8652980" y="3993781"/>
+            <a:off x="12767780" y="6736981"/>
             <a:ext cx="4704432" cy="2308324"/>
           </a:xfrm>
           <a:prstGeom prst="rect">
@@ -3754,7 +3754,7 @@
         </p:nvSpPr>
         <p:spPr>
           <a:xfrm>
-            <a:off x="764088" y="6525039"/>
+            <a:off x="4878888" y="9268240"/>
             <a:ext cx="12342804" cy="584775"/>
           </a:xfrm>
           <a:prstGeom prst="rect">
@@ -3809,7 +3809,7 @@
         </p:nvSpPr>
         <p:spPr>
           <a:xfrm>
-            <a:off x="764088" y="7305868"/>
+            <a:off x="4878888" y="10049069"/>
             <a:ext cx="12246280" cy="1015663"/>
           </a:xfrm>
           <a:prstGeom prst="rect">
@@ -3844,7 +3844,7 @@
         </p:nvSpPr>
         <p:spPr>
           <a:xfrm>
-            <a:off x="764091" y="8686341"/>
+            <a:off x="4878892" y="11429542"/>
             <a:ext cx="11883673" cy="461665"/>
           </a:xfrm>
           <a:prstGeom prst="rect">
@@ -3859,7 +3859,7 @@
           <a:lstStyle/>
           <a:p>
             <a:r>
-              <a:rPr lang="en-US" sz="2400" dirty="0"/>
+              <a:rPr lang="en-US" dirty="0"/>
               <a:t>Timestamping Atomic Load, Store, and CAS operations </a:t>
             </a:r>
           </a:p>
@@ -3879,7 +3879,7 @@
         </p:nvSpPr>
         <p:spPr>
           <a:xfrm>
-            <a:off x="2710807" y="10893286"/>
+            <a:off x="6825608" y="13636486"/>
             <a:ext cx="1328725" cy="983974"/>
           </a:xfrm>
           <a:prstGeom prst="roundRect">
@@ -3939,7 +3939,7 @@
         </p:nvSpPr>
         <p:spPr>
           <a:xfrm>
-            <a:off x="5045878" y="10893286"/>
+            <a:off x="9160679" y="13636486"/>
             <a:ext cx="1328725" cy="983974"/>
           </a:xfrm>
           <a:prstGeom prst="roundRect">
@@ -3999,7 +3999,7 @@
         </p:nvSpPr>
         <p:spPr>
           <a:xfrm>
-            <a:off x="7341403" y="10893286"/>
+            <a:off x="11456204" y="13636486"/>
             <a:ext cx="1328725" cy="983974"/>
           </a:xfrm>
           <a:prstGeom prst="roundRect">
@@ -4059,7 +4059,7 @@
         </p:nvSpPr>
         <p:spPr>
           <a:xfrm>
-            <a:off x="9676474" y="10893286"/>
+            <a:off x="13791275" y="13636486"/>
             <a:ext cx="1328725" cy="983974"/>
           </a:xfrm>
           <a:prstGeom prst="roundRect">
@@ -4119,7 +4119,7 @@
         </p:nvCxnSpPr>
         <p:spPr>
           <a:xfrm>
-            <a:off x="4102274" y="11385273"/>
+            <a:off x="8217074" y="14128473"/>
             <a:ext cx="807656" cy="0"/>
           </a:xfrm>
           <a:prstGeom prst="straightConnector1">
@@ -4158,7 +4158,7 @@
         </p:nvCxnSpPr>
         <p:spPr>
           <a:xfrm>
-            <a:off x="6450488" y="11385273"/>
+            <a:off x="10565288" y="14128473"/>
             <a:ext cx="807656" cy="0"/>
           </a:xfrm>
           <a:prstGeom prst="straightConnector1">
@@ -4197,7 +4197,7 @@
         </p:nvCxnSpPr>
         <p:spPr>
           <a:xfrm>
-            <a:off x="8747161" y="11385273"/>
+            <a:off x="12861961" y="14128473"/>
             <a:ext cx="807656" cy="0"/>
           </a:xfrm>
           <a:prstGeom prst="straightConnector1">
@@ -4236,7 +4236,7 @@
         </p:nvCxnSpPr>
         <p:spPr>
           <a:xfrm>
-            <a:off x="1882591" y="10480816"/>
+            <a:off x="5997392" y="13224017"/>
             <a:ext cx="671769" cy="655983"/>
           </a:xfrm>
           <a:prstGeom prst="bentConnector3">
@@ -4275,8 +4275,8 @@
         </p:nvSpPr>
         <p:spPr>
           <a:xfrm>
-            <a:off x="1196182" y="10296147"/>
-            <a:ext cx="686406" cy="369332"/>
+            <a:off x="5310983" y="13039348"/>
+            <a:ext cx="853119" cy="461665"/>
           </a:xfrm>
           <a:prstGeom prst="rect">
             <a:avLst/>
@@ -4310,8 +4310,8 @@
         </p:nvSpPr>
         <p:spPr>
           <a:xfrm>
-            <a:off x="9680620" y="10523954"/>
-            <a:ext cx="1320426" cy="369332"/>
+            <a:off x="13795421" y="13267155"/>
+            <a:ext cx="1703287" cy="461665"/>
           </a:xfrm>
           <a:prstGeom prst="rect">
             <a:avLst/>
@@ -4345,7 +4345,7 @@
         </p:nvSpPr>
         <p:spPr>
           <a:xfrm>
-            <a:off x="781563" y="9488652"/>
+            <a:off x="4896363" y="12231853"/>
             <a:ext cx="2941126" cy="430887"/>
           </a:xfrm>
           <a:prstGeom prst="rect">
@@ -4380,8 +4380,8 @@
         </p:nvSpPr>
         <p:spPr>
           <a:xfrm>
-            <a:off x="5958686" y="10439472"/>
-            <a:ext cx="1731564" cy="369332"/>
+            <a:off x="10073486" y="13182673"/>
+            <a:ext cx="2250360" cy="461665"/>
           </a:xfrm>
           <a:prstGeom prst="rect">
             <a:avLst/>
@@ -4415,8 +4415,8 @@
         </p:nvSpPr>
         <p:spPr>
           <a:xfrm>
-            <a:off x="2652152" y="10523954"/>
-            <a:ext cx="1530484" cy="369332"/>
+            <a:off x="6766953" y="13267155"/>
+            <a:ext cx="1979581" cy="461665"/>
           </a:xfrm>
           <a:prstGeom prst="rect">
             <a:avLst/>
@@ -4450,8 +4450,8 @@
         </p:nvSpPr>
         <p:spPr>
           <a:xfrm>
-            <a:off x="7926813" y="9572951"/>
-            <a:ext cx="4460091" cy="646331"/>
+            <a:off x="12041614" y="12316152"/>
+            <a:ext cx="4460091" cy="1200329"/>
           </a:xfrm>
           <a:prstGeom prst="rect">
             <a:avLst/>
@@ -4485,8 +4485,8 @@
         </p:nvSpPr>
         <p:spPr>
           <a:xfrm>
-            <a:off x="10484056" y="12134020"/>
-            <a:ext cx="3405918" cy="646331"/>
+            <a:off x="14598856" y="14877221"/>
+            <a:ext cx="3405918" cy="1200329"/>
           </a:xfrm>
           <a:prstGeom prst="rect">
             <a:avLst/>
@@ -4523,8 +4523,8 @@
         </p:nvCxnSpPr>
         <p:spPr>
           <a:xfrm>
-            <a:off x="12386904" y="9896114"/>
-            <a:ext cx="671769" cy="2237170"/>
+            <a:off x="16501705" y="12916316"/>
+            <a:ext cx="671769" cy="1960168"/>
           </a:xfrm>
           <a:prstGeom prst="curvedConnector2">
             <a:avLst/>
@@ -4562,8 +4562,8 @@
         </p:nvSpPr>
         <p:spPr>
           <a:xfrm>
-            <a:off x="5782192" y="12395294"/>
-            <a:ext cx="3829144" cy="369332"/>
+            <a:off x="9896992" y="15138495"/>
+            <a:ext cx="3829144" cy="830997"/>
           </a:xfrm>
           <a:prstGeom prst="rect">
             <a:avLst/>
@@ -4599,7 +4599,7 @@
         </p:nvCxnSpPr>
         <p:spPr>
           <a:xfrm flipV="1">
-            <a:off x="7955280" y="12007504"/>
+            <a:off x="12070080" y="14750704"/>
             <a:ext cx="0" cy="387790"/>
           </a:xfrm>
           <a:prstGeom prst="straightConnector1">
@@ -4643,7 +4643,7 @@
         </p:nvCxnSpPr>
         <p:spPr>
           <a:xfrm flipV="1">
-            <a:off x="9150989" y="12076278"/>
+            <a:off x="13265789" y="14819479"/>
             <a:ext cx="403828" cy="354439"/>
           </a:xfrm>
           <a:prstGeom prst="straightConnector1">
@@ -4687,7 +4687,7 @@
         </p:nvCxnSpPr>
         <p:spPr>
           <a:xfrm flipH="1" flipV="1">
-            <a:off x="5652134" y="12044609"/>
+            <a:off x="9766935" y="14787809"/>
             <a:ext cx="161321" cy="313580"/>
           </a:xfrm>
           <a:prstGeom prst="straightConnector1">
@@ -4729,7 +4729,7 @@
         </p:nvSpPr>
         <p:spPr>
           <a:xfrm>
-            <a:off x="1020783" y="11395356"/>
+            <a:off x="5135583" y="14138557"/>
             <a:ext cx="1766580" cy="1384995"/>
           </a:xfrm>
           <a:prstGeom prst="rect">
@@ -4764,7 +4764,7 @@
         </p:nvSpPr>
         <p:spPr>
           <a:xfrm>
-            <a:off x="494342" y="13165020"/>
+            <a:off x="4609142" y="15908221"/>
             <a:ext cx="5761654" cy="3188933"/>
           </a:xfrm>
           <a:prstGeom prst="roundRect">
@@ -5118,7 +5118,7 @@
         </p:nvSpPr>
         <p:spPr>
           <a:xfrm>
-            <a:off x="6551900" y="12920258"/>
+            <a:off x="10666701" y="15663459"/>
             <a:ext cx="6799187" cy="3433695"/>
           </a:xfrm>
           <a:prstGeom prst="roundRect">
@@ -5468,7 +5468,7 @@
         </p:nvSpPr>
         <p:spPr>
           <a:xfrm>
-            <a:off x="740970" y="17089517"/>
+            <a:off x="4855770" y="19832718"/>
             <a:ext cx="3068148" cy="430887"/>
           </a:xfrm>
           <a:prstGeom prst="rect">
@@ -5503,7 +5503,7 @@
         </p:nvSpPr>
         <p:spPr>
           <a:xfrm>
-            <a:off x="3125300" y="18884953"/>
+            <a:off x="7240101" y="21628153"/>
             <a:ext cx="2228039" cy="1741448"/>
           </a:xfrm>
           <a:prstGeom prst="roundRect">
@@ -5568,7 +5568,7 @@
         </p:nvCxnSpPr>
         <p:spPr>
           <a:xfrm>
-            <a:off x="2254127" y="19099694"/>
+            <a:off x="6368928" y="21842895"/>
             <a:ext cx="671769" cy="655983"/>
           </a:xfrm>
           <a:prstGeom prst="bentConnector3">
@@ -5607,8 +5607,8 @@
         </p:nvSpPr>
         <p:spPr>
           <a:xfrm>
-            <a:off x="1532069" y="18917714"/>
-            <a:ext cx="686406" cy="369332"/>
+            <a:off x="5646870" y="21660915"/>
+            <a:ext cx="853119" cy="461665"/>
           </a:xfrm>
           <a:prstGeom prst="rect">
             <a:avLst/>
@@ -5642,8 +5642,8 @@
         </p:nvSpPr>
         <p:spPr>
           <a:xfrm>
-            <a:off x="3109669" y="20809144"/>
-            <a:ext cx="3340819" cy="646331"/>
+            <a:off x="7224470" y="23552345"/>
+            <a:ext cx="3340819" cy="1200329"/>
           </a:xfrm>
           <a:prstGeom prst="rect">
             <a:avLst/>
@@ -5677,7 +5677,7 @@
         </p:nvSpPr>
         <p:spPr>
           <a:xfrm>
-            <a:off x="6551900" y="17471655"/>
+            <a:off x="10666701" y="20214855"/>
             <a:ext cx="6799187" cy="2643954"/>
           </a:xfrm>
           <a:prstGeom prst="roundRect">
@@ -6051,8 +6051,8 @@
         </p:nvSpPr>
         <p:spPr>
           <a:xfrm>
-            <a:off x="2336579" y="17757394"/>
-            <a:ext cx="3016760" cy="923330"/>
+            <a:off x="6451379" y="20500594"/>
+            <a:ext cx="3016760" cy="1569660"/>
           </a:xfrm>
           <a:prstGeom prst="rect">
             <a:avLst/>
@@ -6086,8 +6086,8 @@
         </p:nvSpPr>
         <p:spPr>
           <a:xfrm>
-            <a:off x="3958629" y="9771540"/>
-            <a:ext cx="3016760" cy="646331"/>
+            <a:off x="8073429" y="12514741"/>
+            <a:ext cx="3016760" cy="830997"/>
           </a:xfrm>
           <a:prstGeom prst="rect">
             <a:avLst/>
@@ -6121,7 +6121,7 @@
         </p:nvSpPr>
         <p:spPr>
           <a:xfrm>
-            <a:off x="741551" y="19618377"/>
+            <a:off x="4856351" y="22361578"/>
             <a:ext cx="1461870" cy="954107"/>
           </a:xfrm>
           <a:prstGeom prst="rect">
@@ -6156,7 +6156,7 @@
         </p:nvSpPr>
         <p:spPr>
           <a:xfrm>
-            <a:off x="1" y="22077826"/>
+            <a:off x="4114801" y="24821026"/>
             <a:ext cx="7690250" cy="4272448"/>
           </a:xfrm>
           <a:prstGeom prst="rect">
@@ -6218,7 +6218,7 @@
         </p:nvSpPr>
         <p:spPr>
           <a:xfrm>
-            <a:off x="554432" y="16433795"/>
+            <a:off x="4669232" y="19176995"/>
             <a:ext cx="9845612" cy="523220"/>
           </a:xfrm>
           <a:prstGeom prst="rect">
@@ -6260,7 +6260,7 @@
         </p:nvSpPr>
         <p:spPr>
           <a:xfrm>
-            <a:off x="5234052" y="21566509"/>
+            <a:off x="9348852" y="24309710"/>
             <a:ext cx="9845612" cy="307777"/>
           </a:xfrm>
           <a:prstGeom prst="rect">
@@ -6295,7 +6295,7 @@
         </p:nvSpPr>
         <p:spPr>
           <a:xfrm>
-            <a:off x="7690250" y="22077826"/>
+            <a:off x="11805051" y="24821026"/>
             <a:ext cx="6039751" cy="4272448"/>
           </a:xfrm>
           <a:prstGeom prst="rect">
@@ -6449,7 +6449,7 @@
         </p:blipFill>
         <p:spPr>
           <a:xfrm>
-            <a:off x="11709166" y="26452198"/>
+            <a:off x="15823966" y="29195398"/>
             <a:ext cx="938598" cy="938598"/>
           </a:xfrm>
           <a:prstGeom prst="rect">
@@ -6479,7 +6479,7 @@
         </p:blipFill>
         <p:spPr>
           <a:xfrm>
-            <a:off x="12647764" y="26384644"/>
+            <a:off x="16762564" y="29127844"/>
             <a:ext cx="1082238" cy="1082238"/>
           </a:xfrm>
           <a:prstGeom prst="rect">
@@ -6501,8 +6501,8 @@
         </p:nvSpPr>
         <p:spPr>
           <a:xfrm>
-            <a:off x="8148918" y="20379394"/>
-            <a:ext cx="4802763" cy="923330"/>
+            <a:off x="12263719" y="23122594"/>
+            <a:ext cx="4802763" cy="1569660"/>
           </a:xfrm>
           <a:prstGeom prst="rect">
             <a:avLst/>
@@ -6536,7 +6536,7 @@
         </p:nvSpPr>
         <p:spPr>
           <a:xfrm rot="5400000">
-            <a:off x="7457714" y="20228519"/>
+            <a:off x="11572515" y="22971720"/>
             <a:ext cx="465071" cy="646331"/>
           </a:xfrm>
           <a:prstGeom prst="bentUpArrow">
